--- a/docs/slides/pptx/M3_콘텐츠작성실습.pptx
+++ b/docs/slides/pptx/M3_콘텐츠작성실습.pptx
@@ -3148,7 +3148,7 @@
           </a:fontRef>
         </p:style>
         <p:txBody>
-          <a:bodyPr rtlCol="0" anchor="ctr"/>
+          <a:bodyPr rtlCol="0" anchor="t" wrap="square"/>
           <a:lstStyle/>
           <a:p>
             <a:pPr algn="ctr"/>
@@ -3192,7 +3192,7 @@
           </a:fontRef>
         </p:style>
         <p:txBody>
-          <a:bodyPr rtlCol="0" anchor="ctr"/>
+          <a:bodyPr rtlCol="0" anchor="t" wrap="square"/>
           <a:lstStyle/>
           <a:p>
             <a:pPr algn="ctr"/>
@@ -3236,7 +3236,7 @@
           </a:fontRef>
         </p:style>
         <p:txBody>
-          <a:bodyPr rtlCol="0" anchor="ctr"/>
+          <a:bodyPr rtlCol="0" anchor="t" wrap="square"/>
           <a:lstStyle/>
           <a:p>
             <a:pPr algn="ctr"/>
@@ -3280,7 +3280,7 @@
           </a:fontRef>
         </p:style>
         <p:txBody>
-          <a:bodyPr rtlCol="0" anchor="ctr"/>
+          <a:bodyPr rtlCol="0" anchor="t" wrap="square"/>
           <a:lstStyle/>
           <a:p>
             <a:pPr algn="ctr"/>
@@ -3324,7 +3324,7 @@
           </a:fontRef>
         </p:style>
         <p:txBody>
-          <a:bodyPr rtlCol="0" anchor="ctr"/>
+          <a:bodyPr rtlCol="0" anchor="t" wrap="square"/>
           <a:lstStyle/>
           <a:p>
             <a:pPr algn="ctr"/>
@@ -3368,7 +3368,7 @@
           </a:fontRef>
         </p:style>
         <p:txBody>
-          <a:bodyPr rtlCol="0" anchor="ctr"/>
+          <a:bodyPr rtlCol="0" anchor="t" wrap="square"/>
           <a:lstStyle/>
           <a:p>
             <a:pPr algn="ctr"/>
@@ -3412,7 +3412,7 @@
           </a:fontRef>
         </p:style>
         <p:txBody>
-          <a:bodyPr rtlCol="0" anchor="ctr"/>
+          <a:bodyPr rtlCol="0" anchor="t" wrap="square"/>
           <a:lstStyle/>
           <a:p>
             <a:pPr algn="ctr"/>
@@ -3624,7 +3624,7 @@
           </a:fontRef>
         </p:style>
         <p:txBody>
-          <a:bodyPr rtlCol="0" anchor="ctr"/>
+          <a:bodyPr rtlCol="0" anchor="t" wrap="square"/>
           <a:lstStyle/>
           <a:p>
             <a:pPr algn="ctr"/>
@@ -3926,7 +3926,7 @@
           </a:fontRef>
         </p:style>
         <p:txBody>
-          <a:bodyPr rtlCol="0" anchor="ctr"/>
+          <a:bodyPr rtlCol="0" anchor="t" wrap="square"/>
           <a:lstStyle/>
           <a:p>
             <a:pPr algn="ctr"/>
@@ -4230,7 +4230,7 @@
           </a:fontRef>
         </p:style>
         <p:txBody>
-          <a:bodyPr rtlCol="0" anchor="ctr"/>
+          <a:bodyPr rtlCol="0" anchor="t" wrap="square"/>
           <a:lstStyle/>
           <a:p>
             <a:pPr algn="ctr"/>
@@ -4345,10 +4345,10 @@
           </a:fontRef>
         </p:style>
         <p:txBody>
-          <a:bodyPr rtlCol="0" anchor="ctr" wrap="square" lIns="411480" rIns="365760" tIns="502920" bIns="320040"/>
-          <a:lstStyle/>
-          <a:p>
-            <a:pPr algn="ctr">
+          <a:bodyPr rtlCol="0" anchor="t" wrap="square" lIns="411480" rIns="365760" tIns="502920" bIns="320040"/>
+          <a:lstStyle/>
+          <a:p>
+            <a:pPr algn="l">
               <a:lnSpc>
                 <a:spcPct val="115000"/>
               </a:lnSpc>
@@ -4372,7 +4372,7 @@
             </a:r>
           </a:p>
           <a:p>
-            <a:pPr>
+            <a:pPr algn="l">
               <a:lnSpc>
                 <a:spcPct val="115000"/>
               </a:lnSpc>
@@ -4396,7 +4396,7 @@
             </a:r>
           </a:p>
           <a:p>
-            <a:pPr>
+            <a:pPr algn="l">
               <a:lnSpc>
                 <a:spcPct val="115000"/>
               </a:lnSpc>
@@ -4420,7 +4420,7 @@
             </a:r>
           </a:p>
           <a:p>
-            <a:pPr>
+            <a:pPr algn="l">
               <a:lnSpc>
                 <a:spcPct val="115000"/>
               </a:lnSpc>
@@ -4444,7 +4444,7 @@
             </a:r>
           </a:p>
           <a:p>
-            <a:pPr>
+            <a:pPr algn="l">
               <a:lnSpc>
                 <a:spcPct val="115000"/>
               </a:lnSpc>
@@ -4468,7 +4468,7 @@
             </a:r>
           </a:p>
           <a:p>
-            <a:pPr>
+            <a:pPr algn="l">
               <a:lnSpc>
                 <a:spcPct val="115000"/>
               </a:lnSpc>
@@ -4492,7 +4492,7 @@
             </a:r>
           </a:p>
           <a:p>
-            <a:pPr>
+            <a:pPr algn="l">
               <a:lnSpc>
                 <a:spcPct val="115000"/>
               </a:lnSpc>
@@ -4554,7 +4554,7 @@
           </a:fontRef>
         </p:style>
         <p:txBody>
-          <a:bodyPr rtlCol="0" anchor="ctr"/>
+          <a:bodyPr rtlCol="0" anchor="t" wrap="square"/>
           <a:lstStyle/>
           <a:p>
             <a:pPr algn="ctr"/>
@@ -4624,7 +4624,7 @@
           </a:fontRef>
         </p:style>
         <p:txBody>
-          <a:bodyPr rtlCol="0" anchor="ctr"/>
+          <a:bodyPr rtlCol="0" anchor="t" wrap="square"/>
           <a:lstStyle/>
           <a:p>
             <a:pPr algn="ctr"/>
@@ -4739,7 +4739,7 @@
           </a:fontRef>
         </p:style>
         <p:txBody>
-          <a:bodyPr rtlCol="0" anchor="ctr" wrap="square" lIns="365760" rIns="365760" tIns="228600" bIns="182880"/>
+          <a:bodyPr rtlCol="0" anchor="t" wrap="square" lIns="365760" rIns="365760" tIns="228600" bIns="182880"/>
           <a:lstStyle/>
           <a:p>
             <a:pPr algn="l">
@@ -4874,7 +4874,7 @@
           </a:fontRef>
         </p:style>
         <p:txBody>
-          <a:bodyPr rtlCol="0" anchor="ctr" wrap="square" lIns="365760" rIns="365760" tIns="201168" bIns="182880"/>
+          <a:bodyPr rtlCol="0" anchor="t" wrap="square" lIns="365760" rIns="365760" tIns="201168" bIns="182880"/>
           <a:lstStyle/>
           <a:p>
             <a:pPr algn="l">
@@ -4976,7 +4976,7 @@
           </a:fontRef>
         </p:style>
         <p:txBody>
-          <a:bodyPr rtlCol="0" anchor="ctr"/>
+          <a:bodyPr rtlCol="0" anchor="t" wrap="square"/>
           <a:lstStyle/>
           <a:p>
             <a:pPr algn="ctr"/>
@@ -5232,7 +5232,7 @@
           </a:fontRef>
         </p:style>
         <p:txBody>
-          <a:bodyPr rtlCol="0" anchor="ctr"/>
+          <a:bodyPr rtlCol="0" anchor="t" wrap="square"/>
           <a:lstStyle/>
           <a:p>
             <a:pPr algn="ctr"/>
@@ -5501,7 +5501,7 @@
           </a:fontRef>
         </p:style>
         <p:txBody>
-          <a:bodyPr rtlCol="0" anchor="ctr"/>
+          <a:bodyPr rtlCol="0" anchor="t" wrap="square"/>
           <a:lstStyle/>
           <a:p>
             <a:pPr algn="ctr"/>
@@ -5701,7 +5701,7 @@
           </a:fontRef>
         </p:style>
         <p:txBody>
-          <a:bodyPr rtlCol="0" anchor="ctr"/>
+          <a:bodyPr rtlCol="0" anchor="t" wrap="square"/>
           <a:lstStyle/>
           <a:p>
             <a:pPr algn="ctr"/>
@@ -5935,7 +5935,7 @@
           </a:fontRef>
         </p:style>
         <p:txBody>
-          <a:bodyPr rtlCol="0" anchor="ctr"/>
+          <a:bodyPr rtlCol="0" anchor="t" wrap="square"/>
           <a:lstStyle/>
           <a:p>
             <a:pPr algn="ctr"/>
@@ -6169,7 +6169,7 @@
           </a:fontRef>
         </p:style>
         <p:txBody>
-          <a:bodyPr rtlCol="0" anchor="ctr"/>
+          <a:bodyPr rtlCol="0" anchor="t" wrap="square"/>
           <a:lstStyle/>
           <a:p>
             <a:pPr algn="ctr"/>
@@ -6334,7 +6334,7 @@
           </a:fontRef>
         </p:style>
         <p:txBody>
-          <a:bodyPr rtlCol="0" anchor="ctr"/>
+          <a:bodyPr rtlCol="0" anchor="t" wrap="square"/>
           <a:lstStyle/>
           <a:p>
             <a:pPr algn="ctr"/>
@@ -6636,7 +6636,7 @@
           </a:fontRef>
         </p:style>
         <p:txBody>
-          <a:bodyPr rtlCol="0" anchor="ctr"/>
+          <a:bodyPr rtlCol="0" anchor="t" wrap="square"/>
           <a:lstStyle/>
           <a:p>
             <a:pPr algn="ctr"/>
@@ -6940,7 +6940,7 @@
           </a:fontRef>
         </p:style>
         <p:txBody>
-          <a:bodyPr rtlCol="0" anchor="ctr"/>
+          <a:bodyPr rtlCol="0" anchor="t" wrap="square"/>
           <a:lstStyle/>
           <a:p>
             <a:pPr algn="ctr"/>
@@ -7055,10 +7055,10 @@
           </a:fontRef>
         </p:style>
         <p:txBody>
-          <a:bodyPr rtlCol="0" anchor="ctr" wrap="square" lIns="411480" rIns="365760" tIns="502920" bIns="320040"/>
-          <a:lstStyle/>
-          <a:p>
-            <a:pPr algn="ctr">
+          <a:bodyPr rtlCol="0" anchor="t" wrap="square" lIns="411480" rIns="365760" tIns="502920" bIns="320040"/>
+          <a:lstStyle/>
+          <a:p>
+            <a:pPr algn="l">
               <a:lnSpc>
                 <a:spcPct val="115000"/>
               </a:lnSpc>
@@ -7082,7 +7082,7 @@
             </a:r>
           </a:p>
           <a:p>
-            <a:pPr>
+            <a:pPr algn="l">
               <a:lnSpc>
                 <a:spcPct val="115000"/>
               </a:lnSpc>
@@ -7106,7 +7106,7 @@
             </a:r>
           </a:p>
           <a:p>
-            <a:pPr>
+            <a:pPr algn="l">
               <a:lnSpc>
                 <a:spcPct val="115000"/>
               </a:lnSpc>
@@ -7130,7 +7130,7 @@
             </a:r>
           </a:p>
           <a:p>
-            <a:pPr>
+            <a:pPr algn="l">
               <a:lnSpc>
                 <a:spcPct val="115000"/>
               </a:lnSpc>
@@ -7154,7 +7154,7 @@
             </a:r>
           </a:p>
           <a:p>
-            <a:pPr>
+            <a:pPr algn="l">
               <a:lnSpc>
                 <a:spcPct val="115000"/>
               </a:lnSpc>
@@ -7216,7 +7216,7 @@
           </a:fontRef>
         </p:style>
         <p:txBody>
-          <a:bodyPr rtlCol="0" anchor="ctr"/>
+          <a:bodyPr rtlCol="0" anchor="t" wrap="square"/>
           <a:lstStyle/>
           <a:p>
             <a:pPr algn="ctr"/>
@@ -7286,7 +7286,7 @@
           </a:fontRef>
         </p:style>
         <p:txBody>
-          <a:bodyPr rtlCol="0" anchor="ctr"/>
+          <a:bodyPr rtlCol="0" anchor="t" wrap="square"/>
           <a:lstStyle/>
           <a:p>
             <a:pPr algn="ctr"/>
@@ -7401,7 +7401,7 @@
           </a:fontRef>
         </p:style>
         <p:txBody>
-          <a:bodyPr rtlCol="0" anchor="ctr" wrap="square" lIns="365760" rIns="365760" tIns="228600" bIns="182880"/>
+          <a:bodyPr rtlCol="0" anchor="t" wrap="square" lIns="365760" rIns="365760" tIns="228600" bIns="182880"/>
           <a:lstStyle/>
           <a:p>
             <a:pPr algn="l">
@@ -7536,7 +7536,7 @@
           </a:fontRef>
         </p:style>
         <p:txBody>
-          <a:bodyPr rtlCol="0" anchor="ctr" wrap="square" lIns="365760" rIns="365760" tIns="201168" bIns="182880"/>
+          <a:bodyPr rtlCol="0" anchor="t" wrap="square" lIns="365760" rIns="365760" tIns="201168" bIns="182880"/>
           <a:lstStyle/>
           <a:p>
             <a:pPr algn="l">
@@ -7638,7 +7638,7 @@
           </a:fontRef>
         </p:style>
         <p:txBody>
-          <a:bodyPr rtlCol="0" anchor="ctr"/>
+          <a:bodyPr rtlCol="0" anchor="t" wrap="square"/>
           <a:lstStyle/>
           <a:p>
             <a:pPr algn="ctr"/>
